--- a/CM_TDR_Group_Guidance.pptx
+++ b/CM_TDR_Group_Guidance.pptx
@@ -1036,7 +1036,7 @@
                 <a:ea typeface="Arial" pitchFamily="34" charset="-122"/>
                 <a:cs typeface="Arial" pitchFamily="34" charset="-120"/>
               </a:rPr>
-              <a:t>274 requirements, four groups, two sheets. Every group works the same way; only the clause range differs.</a:t>
+              <a:t>274 requirements, four groups, two sheets. Row count is not workload: Group 3 has 110 rows but about the same pull count as Group 2. Staff to pulls.</a:t>
             </a:r>
             <a:endParaRPr lang="en-US" sz="1200" dirty="0"/>
           </a:p>
@@ -1290,7 +1290,7 @@
                 <a:ea typeface="Arial" pitchFamily="34" charset="-122"/>
                 <a:cs typeface="Arial" pitchFamily="34" charset="-120"/>
               </a:rPr>
-              <a:t>Expect 12 to 20 pulls per group, not one per requirement.</a:t>
+              <a:t>50 starter pulls are pre-seeded by group. Split or delete freely.</a:t>
             </a:r>
             <a:endParaRPr lang="en-US" sz="1050" dirty="0"/>
           </a:p>
@@ -3774,7 +3774,7 @@
                 <a:ea typeface="Arial" pitchFamily="34" charset="-122"/>
                 <a:cs typeface="Arial" pitchFamily="34" charset="-120"/>
               </a:rPr>
-              <a:t>Not tailorable. Always Full depth, so their pull must carry a record sample.</a:t>
+              <a:t>Not tailorable. Always Full depth: a record sample on transactional and event pulls, every row graded individually on artifact pulls.</a:t>
             </a:r>
             <a:endParaRPr lang="en-US" sz="1050" dirty="0"/>
           </a:p>
@@ -3809,8 +3809,8 @@
         </p:nvSpPr>
         <p:spPr>
           <a:xfrm>
-            <a:off x="502920" y="5870448"/>
-            <a:ext cx="11155680" cy="347472"/>
+            <a:off x="502920" y="5687568"/>
+            <a:ext cx="11155680" cy="219456"/>
           </a:xfrm>
           <a:prstGeom prst="rect">
             <a:avLst/>
@@ -3826,7 +3826,7 @@
               <a:buNone/>
             </a:pPr>
             <a:r>
-              <a:rPr lang="en-US" sz="1100" b="1" dirty="0">
+              <a:rPr lang="en-US" sz="1200" b="1" dirty="0">
                 <a:solidFill>
                   <a:srgbClr val="1F3864"/>
                 </a:solidFill>
@@ -3834,12 +3834,661 @@
                 <a:ea typeface="Arial" pitchFamily="34" charset="-122"/>
                 <a:cs typeface="Arial" pitchFamily="34" charset="-120"/>
               </a:rPr>
-              <a:t>Row count is not workload. Group 3 has 110 rows but about the same pull count as Group 2. Staff to pulls.</a:t>
+              <a:t>Sample rule: you do not choose a size, the evidence class chooses it</a:t>
             </a:r>
-            <a:endParaRPr lang="en-US" sz="1100" dirty="0"/>
+            <a:endParaRPr lang="en-US" sz="1200" dirty="0"/>
           </a:p>
         </p:txBody>
       </p:sp>
+      <p:graphicFrame>
+        <p:nvGraphicFramePr>
+          <p:cNvPr id="3" name="Table 1"/>
+          <p:cNvGraphicFramePr>
+            <a:graphicFrameLocks noGrp="1"/>
+          </p:cNvGraphicFramePr>
+          <p:nvPr>
+            <p:extLst>
+              <p:ext uri="{D42A27DB-BD31-4B8C-83A1-F6EECF244321}">
+                <p14:modId xmlns:p14="http://schemas.microsoft.com/office/powerpoint/2010/main" val="1579011935"/>
+              </p:ext>
+            </p:extLst>
+          </p:nvPr>
+        </p:nvGraphicFramePr>
+        <p:xfrm>
+          <a:off x="502920" y="5943600"/>
+          <a:ext cx="11155680" cy="914400"/>
+        </p:xfrm>
+        <a:graphic>
+          <a:graphicData uri="http://schemas.openxmlformats.org/drawingml/2006/table">
+            <a:tbl>
+              <a:tblPr/>
+              <a:tblGrid>
+                <a:gridCol w="1371600"/>
+                <a:gridCol w="5486400"/>
+                <a:gridCol w="4297680"/>
+              </a:tblGrid>
+              <a:tr h="228600">
+                <a:tc>
+                  <a:txBody>
+                    <a:bodyPr/>
+                    <a:lstStyle/>
+                    <a:p>
+                      <a:pPr algn="l" indent="0" marL="0">
+                        <a:buNone/>
+                      </a:pPr>
+                      <a:r>
+                        <a:rPr lang="en-US" sz="1000" b="1" dirty="0">
+                          <a:solidFill>
+                            <a:srgbClr val="222222"/>
+                          </a:solidFill>
+                          <a:latin typeface="Arial" pitchFamily="34" charset="0"/>
+                          <a:ea typeface="Arial" pitchFamily="34" charset="-122"/>
+                          <a:cs typeface="Arial" pitchFamily="34" charset="-120"/>
+                        </a:rPr>
+                        <a:t>Transactional</a:t>
+                      </a:r>
+                      <a:endParaRPr lang="en-US" sz="1000" dirty="0">
+                        <a:latin typeface="Arial" charset="0"/>
+                        <a:ea typeface="Arial" charset="0"/>
+                        <a:cs typeface="Arial" charset="0"/>
+                      </a:endParaRPr>
+                    </a:p>
+                  </a:txBody>
+                  <a:tcPr marL="91440" marR="91440" marT="45720" marB="45720" anchor="ctr">
+                    <a:lnL w="9525" cap="flat" cmpd="sng" algn="ctr">
+                      <a:solidFill>
+                        <a:srgbClr val="D0D0D0"/>
+                      </a:solidFill>
+                      <a:prstDash val="solid"/>
+                      <a:round/>
+                      <a:headEnd type="none" w="med" len="med"/>
+                      <a:tailEnd type="none" w="med" len="med"/>
+                    </a:lnL>
+                    <a:lnR w="9525" cap="flat" cmpd="sng" algn="ctr">
+                      <a:solidFill>
+                        <a:srgbClr val="D0D0D0"/>
+                      </a:solidFill>
+                      <a:prstDash val="solid"/>
+                      <a:round/>
+                      <a:headEnd type="none" w="med" len="med"/>
+                      <a:tailEnd type="none" w="med" len="med"/>
+                    </a:lnR>
+                    <a:lnT w="9525" cap="flat" cmpd="sng" algn="ctr">
+                      <a:solidFill>
+                        <a:srgbClr val="D0D0D0"/>
+                      </a:solidFill>
+                      <a:prstDash val="solid"/>
+                      <a:round/>
+                      <a:headEnd type="none" w="med" len="med"/>
+                      <a:tailEnd type="none" w="med" len="med"/>
+                    </a:lnT>
+                    <a:lnB w="9525" cap="flat" cmpd="sng" algn="ctr">
+                      <a:solidFill>
+                        <a:srgbClr val="D0D0D0"/>
+                      </a:solidFill>
+                      <a:prstDash val="solid"/>
+                      <a:round/>
+                      <a:headEnd type="none" w="med" len="med"/>
+                      <a:tailEnd type="none" w="med" len="med"/>
+                    </a:lnB>
+                    <a:solidFill>
+                      <a:srgbClr val="FFFFFF"/>
+                    </a:solidFill>
+                  </a:tcPr>
+                </a:tc>
+                <a:tc>
+                  <a:txBody>
+                    <a:bodyPr/>
+                    <a:lstStyle/>
+                    <a:p>
+                      <a:pPr algn="l" indent="0" marL="0">
+                        <a:buNone/>
+                      </a:pPr>
+                      <a:r>
+                        <a:rPr lang="en-US" sz="1000" dirty="0">
+                          <a:solidFill>
+                            <a:srgbClr val="222222"/>
+                          </a:solidFill>
+                          <a:latin typeface="Arial" pitchFamily="34" charset="0"/>
+                          <a:ea typeface="Arial" pitchFamily="34" charset="-122"/>
+                          <a:cs typeface="Arial" pitchFamily="34" charset="-120"/>
+                        </a:rPr>
+                        <a:t>ECPs, RFVs, NORs, release records, CSA entries. Trailing 12 months.</a:t>
+                      </a:r>
+                      <a:endParaRPr lang="en-US" sz="1000" dirty="0">
+                        <a:latin typeface="Arial" charset="0"/>
+                        <a:ea typeface="Arial" charset="0"/>
+                        <a:cs typeface="Arial" charset="0"/>
+                      </a:endParaRPr>
+                    </a:p>
+                  </a:txBody>
+                  <a:tcPr marL="91440" marR="91440" marT="45720" marB="45720" anchor="ctr">
+                    <a:lnL w="9525" cap="flat" cmpd="sng" algn="ctr">
+                      <a:solidFill>
+                        <a:srgbClr val="D0D0D0"/>
+                      </a:solidFill>
+                      <a:prstDash val="solid"/>
+                      <a:round/>
+                      <a:headEnd type="none" w="med" len="med"/>
+                      <a:tailEnd type="none" w="med" len="med"/>
+                    </a:lnL>
+                    <a:lnR w="9525" cap="flat" cmpd="sng" algn="ctr">
+                      <a:solidFill>
+                        <a:srgbClr val="D0D0D0"/>
+                      </a:solidFill>
+                      <a:prstDash val="solid"/>
+                      <a:round/>
+                      <a:headEnd type="none" w="med" len="med"/>
+                      <a:tailEnd type="none" w="med" len="med"/>
+                    </a:lnR>
+                    <a:lnT w="9525" cap="flat" cmpd="sng" algn="ctr">
+                      <a:solidFill>
+                        <a:srgbClr val="D0D0D0"/>
+                      </a:solidFill>
+                      <a:prstDash val="solid"/>
+                      <a:round/>
+                      <a:headEnd type="none" w="med" len="med"/>
+                      <a:tailEnd type="none" w="med" len="med"/>
+                    </a:lnT>
+                    <a:lnB w="9525" cap="flat" cmpd="sng" algn="ctr">
+                      <a:solidFill>
+                        <a:srgbClr val="D0D0D0"/>
+                      </a:solidFill>
+                      <a:prstDash val="solid"/>
+                      <a:round/>
+                      <a:headEnd type="none" w="med" len="med"/>
+                      <a:tailEnd type="none" w="med" len="med"/>
+                    </a:lnB>
+                    <a:solidFill>
+                      <a:srgbClr val="FFFFFF"/>
+                    </a:solidFill>
+                  </a:tcPr>
+                </a:tc>
+                <a:tc>
+                  <a:txBody>
+                    <a:bodyPr/>
+                    <a:lstStyle/>
+                    <a:p>
+                      <a:pPr algn="l" indent="0" marL="0">
+                        <a:buNone/>
+                      </a:pPr>
+                      <a:r>
+                        <a:rPr lang="en-US" sz="1000" b="1" dirty="0">
+                          <a:solidFill>
+                            <a:srgbClr val="222222"/>
+                          </a:solidFill>
+                          <a:latin typeface="Arial" pitchFamily="34" charset="0"/>
+                          <a:ea typeface="Arial" pitchFamily="34" charset="-122"/>
+                          <a:cs typeface="Arial" pitchFamily="34" charset="-120"/>
+                        </a:rPr>
+                        <a:t>10 records, or all if fewer</a:t>
+                      </a:r>
+                      <a:endParaRPr lang="en-US" sz="1000" dirty="0">
+                        <a:latin typeface="Arial" charset="0"/>
+                        <a:ea typeface="Arial" charset="0"/>
+                        <a:cs typeface="Arial" charset="0"/>
+                      </a:endParaRPr>
+                    </a:p>
+                  </a:txBody>
+                  <a:tcPr marL="91440" marR="91440" marT="45720" marB="45720" anchor="ctr">
+                    <a:lnL w="9525" cap="flat" cmpd="sng" algn="ctr">
+                      <a:solidFill>
+                        <a:srgbClr val="D0D0D0"/>
+                      </a:solidFill>
+                      <a:prstDash val="solid"/>
+                      <a:round/>
+                      <a:headEnd type="none" w="med" len="med"/>
+                      <a:tailEnd type="none" w="med" len="med"/>
+                    </a:lnL>
+                    <a:lnR w="9525" cap="flat" cmpd="sng" algn="ctr">
+                      <a:solidFill>
+                        <a:srgbClr val="D0D0D0"/>
+                      </a:solidFill>
+                      <a:prstDash val="solid"/>
+                      <a:round/>
+                      <a:headEnd type="none" w="med" len="med"/>
+                      <a:tailEnd type="none" w="med" len="med"/>
+                    </a:lnR>
+                    <a:lnT w="9525" cap="flat" cmpd="sng" algn="ctr">
+                      <a:solidFill>
+                        <a:srgbClr val="D0D0D0"/>
+                      </a:solidFill>
+                      <a:prstDash val="solid"/>
+                      <a:round/>
+                      <a:headEnd type="none" w="med" len="med"/>
+                      <a:tailEnd type="none" w="med" len="med"/>
+                    </a:lnT>
+                    <a:lnB w="9525" cap="flat" cmpd="sng" algn="ctr">
+                      <a:solidFill>
+                        <a:srgbClr val="D0D0D0"/>
+                      </a:solidFill>
+                      <a:prstDash val="solid"/>
+                      <a:round/>
+                      <a:headEnd type="none" w="med" len="med"/>
+                      <a:tailEnd type="none" w="med" len="med"/>
+                    </a:lnB>
+                    <a:solidFill>
+                      <a:srgbClr val="FFFFFF"/>
+                    </a:solidFill>
+                  </a:tcPr>
+                </a:tc>
+              </a:tr>
+              <a:tr h="228600">
+                <a:tc>
+                  <a:txBody>
+                    <a:bodyPr/>
+                    <a:lstStyle/>
+                    <a:p>
+                      <a:pPr algn="l" indent="0" marL="0">
+                        <a:buNone/>
+                      </a:pPr>
+                      <a:r>
+                        <a:rPr lang="en-US" sz="1000" b="1" dirty="0">
+                          <a:solidFill>
+                            <a:srgbClr val="222222"/>
+                          </a:solidFill>
+                          <a:latin typeface="Arial" pitchFamily="34" charset="0"/>
+                          <a:ea typeface="Arial" pitchFamily="34" charset="-122"/>
+                          <a:cs typeface="Arial" pitchFamily="34" charset="-120"/>
+                        </a:rPr>
+                        <a:t>Event</a:t>
+                      </a:r>
+                      <a:endParaRPr lang="en-US" sz="1000" dirty="0">
+                        <a:latin typeface="Arial" charset="0"/>
+                        <a:ea typeface="Arial" charset="0"/>
+                        <a:cs typeface="Arial" charset="0"/>
+                      </a:endParaRPr>
+                    </a:p>
+                  </a:txBody>
+                  <a:tcPr marL="91440" marR="91440" marT="45720" marB="45720" anchor="ctr">
+                    <a:lnL w="9525" cap="flat" cmpd="sng" algn="ctr">
+                      <a:solidFill>
+                        <a:srgbClr val="D0D0D0"/>
+                      </a:solidFill>
+                      <a:prstDash val="solid"/>
+                      <a:round/>
+                      <a:headEnd type="none" w="med" len="med"/>
+                      <a:tailEnd type="none" w="med" len="med"/>
+                    </a:lnL>
+                    <a:lnR w="9525" cap="flat" cmpd="sng" algn="ctr">
+                      <a:solidFill>
+                        <a:srgbClr val="D0D0D0"/>
+                      </a:solidFill>
+                      <a:prstDash val="solid"/>
+                      <a:round/>
+                      <a:headEnd type="none" w="med" len="med"/>
+                      <a:tailEnd type="none" w="med" len="med"/>
+                    </a:lnR>
+                    <a:lnT w="9525" cap="flat" cmpd="sng" algn="ctr">
+                      <a:solidFill>
+                        <a:srgbClr val="D0D0D0"/>
+                      </a:solidFill>
+                      <a:prstDash val="solid"/>
+                      <a:round/>
+                      <a:headEnd type="none" w="med" len="med"/>
+                      <a:tailEnd type="none" w="med" len="med"/>
+                    </a:lnT>
+                    <a:lnB w="9525" cap="flat" cmpd="sng" algn="ctr">
+                      <a:solidFill>
+                        <a:srgbClr val="D0D0D0"/>
+                      </a:solidFill>
+                      <a:prstDash val="solid"/>
+                      <a:round/>
+                      <a:headEnd type="none" w="med" len="med"/>
+                      <a:tailEnd type="none" w="med" len="med"/>
+                    </a:lnB>
+                    <a:solidFill>
+                      <a:srgbClr val="FFFFFF"/>
+                    </a:solidFill>
+                  </a:tcPr>
+                </a:tc>
+                <a:tc>
+                  <a:txBody>
+                    <a:bodyPr/>
+                    <a:lstStyle/>
+                    <a:p>
+                      <a:pPr algn="l" indent="0" marL="0">
+                        <a:buNone/>
+                      </a:pPr>
+                      <a:r>
+                        <a:rPr lang="en-US" sz="1000" dirty="0">
+                          <a:solidFill>
+                            <a:srgbClr val="222222"/>
+                          </a:solidFill>
+                          <a:latin typeface="Arial" pitchFamily="34" charset="0"/>
+                          <a:ea typeface="Arial" pitchFamily="34" charset="-122"/>
+                          <a:cs typeface="Arial" pitchFamily="34" charset="-120"/>
+                        </a:rPr>
+                        <a:t>Audits, technical reviews, ICWG meetings.</a:t>
+                      </a:r>
+                      <a:endParaRPr lang="en-US" sz="1000" dirty="0">
+                        <a:latin typeface="Arial" charset="0"/>
+                        <a:ea typeface="Arial" charset="0"/>
+                        <a:cs typeface="Arial" charset="0"/>
+                      </a:endParaRPr>
+                    </a:p>
+                  </a:txBody>
+                  <a:tcPr marL="91440" marR="91440" marT="45720" marB="45720" anchor="ctr">
+                    <a:lnL w="9525" cap="flat" cmpd="sng" algn="ctr">
+                      <a:solidFill>
+                        <a:srgbClr val="D0D0D0"/>
+                      </a:solidFill>
+                      <a:prstDash val="solid"/>
+                      <a:round/>
+                      <a:headEnd type="none" w="med" len="med"/>
+                      <a:tailEnd type="none" w="med" len="med"/>
+                    </a:lnL>
+                    <a:lnR w="9525" cap="flat" cmpd="sng" algn="ctr">
+                      <a:solidFill>
+                        <a:srgbClr val="D0D0D0"/>
+                      </a:solidFill>
+                      <a:prstDash val="solid"/>
+                      <a:round/>
+                      <a:headEnd type="none" w="med" len="med"/>
+                      <a:tailEnd type="none" w="med" len="med"/>
+                    </a:lnR>
+                    <a:lnT w="9525" cap="flat" cmpd="sng" algn="ctr">
+                      <a:solidFill>
+                        <a:srgbClr val="D0D0D0"/>
+                      </a:solidFill>
+                      <a:prstDash val="solid"/>
+                      <a:round/>
+                      <a:headEnd type="none" w="med" len="med"/>
+                      <a:tailEnd type="none" w="med" len="med"/>
+                    </a:lnT>
+                    <a:lnB w="9525" cap="flat" cmpd="sng" algn="ctr">
+                      <a:solidFill>
+                        <a:srgbClr val="D0D0D0"/>
+                      </a:solidFill>
+                      <a:prstDash val="solid"/>
+                      <a:round/>
+                      <a:headEnd type="none" w="med" len="med"/>
+                      <a:tailEnd type="none" w="med" len="med"/>
+                    </a:lnB>
+                    <a:solidFill>
+                      <a:srgbClr val="FFFFFF"/>
+                    </a:solidFill>
+                  </a:tcPr>
+                </a:tc>
+                <a:tc>
+                  <a:txBody>
+                    <a:bodyPr/>
+                    <a:lstStyle/>
+                    <a:p>
+                      <a:pPr algn="l" indent="0" marL="0">
+                        <a:buNone/>
+                      </a:pPr>
+                      <a:r>
+                        <a:rPr lang="en-US" sz="1000" b="1" dirty="0">
+                          <a:solidFill>
+                            <a:srgbClr val="222222"/>
+                          </a:solidFill>
+                          <a:latin typeface="Arial" pitchFamily="34" charset="0"/>
+                          <a:ea typeface="Arial" pitchFamily="34" charset="-122"/>
+                          <a:cs typeface="Arial" pitchFamily="34" charset="-120"/>
+                        </a:rPr>
+                        <a:t>Last 3 occurrences, or all if fewer</a:t>
+                      </a:r>
+                      <a:endParaRPr lang="en-US" sz="1000" dirty="0">
+                        <a:latin typeface="Arial" charset="0"/>
+                        <a:ea typeface="Arial" charset="0"/>
+                        <a:cs typeface="Arial" charset="0"/>
+                      </a:endParaRPr>
+                    </a:p>
+                  </a:txBody>
+                  <a:tcPr marL="91440" marR="91440" marT="45720" marB="45720" anchor="ctr">
+                    <a:lnL w="9525" cap="flat" cmpd="sng" algn="ctr">
+                      <a:solidFill>
+                        <a:srgbClr val="D0D0D0"/>
+                      </a:solidFill>
+                      <a:prstDash val="solid"/>
+                      <a:round/>
+                      <a:headEnd type="none" w="med" len="med"/>
+                      <a:tailEnd type="none" w="med" len="med"/>
+                    </a:lnL>
+                    <a:lnR w="9525" cap="flat" cmpd="sng" algn="ctr">
+                      <a:solidFill>
+                        <a:srgbClr val="D0D0D0"/>
+                      </a:solidFill>
+                      <a:prstDash val="solid"/>
+                      <a:round/>
+                      <a:headEnd type="none" w="med" len="med"/>
+                      <a:tailEnd type="none" w="med" len="med"/>
+                    </a:lnR>
+                    <a:lnT w="9525" cap="flat" cmpd="sng" algn="ctr">
+                      <a:solidFill>
+                        <a:srgbClr val="D0D0D0"/>
+                      </a:solidFill>
+                      <a:prstDash val="solid"/>
+                      <a:round/>
+                      <a:headEnd type="none" w="med" len="med"/>
+                      <a:tailEnd type="none" w="med" len="med"/>
+                    </a:lnT>
+                    <a:lnB w="9525" cap="flat" cmpd="sng" algn="ctr">
+                      <a:solidFill>
+                        <a:srgbClr val="D0D0D0"/>
+                      </a:solidFill>
+                      <a:prstDash val="solid"/>
+                      <a:round/>
+                      <a:headEnd type="none" w="med" len="med"/>
+                      <a:tailEnd type="none" w="med" len="med"/>
+                    </a:lnB>
+                    <a:solidFill>
+                      <a:srgbClr val="FFFFFF"/>
+                    </a:solidFill>
+                  </a:tcPr>
+                </a:tc>
+              </a:tr>
+              <a:tr h="228600">
+                <a:tc>
+                  <a:txBody>
+                    <a:bodyPr/>
+                    <a:lstStyle/>
+                    <a:p>
+                      <a:pPr algn="l" indent="0" marL="0">
+                        <a:buNone/>
+                      </a:pPr>
+                      <a:r>
+                        <a:rPr lang="en-US" sz="1000" b="1" dirty="0">
+                          <a:solidFill>
+                            <a:srgbClr val="222222"/>
+                          </a:solidFill>
+                          <a:latin typeface="Arial" pitchFamily="34" charset="0"/>
+                          <a:ea typeface="Arial" pitchFamily="34" charset="-122"/>
+                          <a:cs typeface="Arial" pitchFamily="34" charset="-120"/>
+                        </a:rPr>
+                        <a:t>Artifact</a:t>
+                      </a:r>
+                      <a:endParaRPr lang="en-US" sz="1000" dirty="0">
+                        <a:latin typeface="Arial" charset="0"/>
+                        <a:ea typeface="Arial" charset="0"/>
+                        <a:cs typeface="Arial" charset="0"/>
+                      </a:endParaRPr>
+                    </a:p>
+                  </a:txBody>
+                  <a:tcPr marL="91440" marR="91440" marT="45720" marB="45720" anchor="ctr">
+                    <a:lnL w="9525" cap="flat" cmpd="sng" algn="ctr">
+                      <a:solidFill>
+                        <a:srgbClr val="D0D0D0"/>
+                      </a:solidFill>
+                      <a:prstDash val="solid"/>
+                      <a:round/>
+                      <a:headEnd type="none" w="med" len="med"/>
+                      <a:tailEnd type="none" w="med" len="med"/>
+                    </a:lnL>
+                    <a:lnR w="9525" cap="flat" cmpd="sng" algn="ctr">
+                      <a:solidFill>
+                        <a:srgbClr val="D0D0D0"/>
+                      </a:solidFill>
+                      <a:prstDash val="solid"/>
+                      <a:round/>
+                      <a:headEnd type="none" w="med" len="med"/>
+                      <a:tailEnd type="none" w="med" len="med"/>
+                    </a:lnR>
+                    <a:lnT w="9525" cap="flat" cmpd="sng" algn="ctr">
+                      <a:solidFill>
+                        <a:srgbClr val="D0D0D0"/>
+                      </a:solidFill>
+                      <a:prstDash val="solid"/>
+                      <a:round/>
+                      <a:headEnd type="none" w="med" len="med"/>
+                      <a:tailEnd type="none" w="med" len="med"/>
+                    </a:lnT>
+                    <a:lnB w="9525" cap="flat" cmpd="sng" algn="ctr">
+                      <a:solidFill>
+                        <a:srgbClr val="D0D0D0"/>
+                      </a:solidFill>
+                      <a:prstDash val="solid"/>
+                      <a:round/>
+                      <a:headEnd type="none" w="med" len="med"/>
+                      <a:tailEnd type="none" w="med" len="med"/>
+                    </a:lnB>
+                    <a:solidFill>
+                      <a:srgbClr val="FFFFFF"/>
+                    </a:solidFill>
+                  </a:tcPr>
+                </a:tc>
+                <a:tc>
+                  <a:txBody>
+                    <a:bodyPr/>
+                    <a:lstStyle/>
+                    <a:p>
+                      <a:pPr algn="l" indent="0" marL="0">
+                        <a:buNone/>
+                      </a:pPr>
+                      <a:r>
+                        <a:rPr lang="en-US" sz="1000" dirty="0">
+                          <a:solidFill>
+                            <a:srgbClr val="222222"/>
+                          </a:solidFill>
+                          <a:latin typeface="Arial" pitchFamily="34" charset="0"/>
+                          <a:ea typeface="Arial" pitchFamily="34" charset="-122"/>
+                          <a:cs typeface="Arial" pitchFamily="34" charset="-120"/>
+                        </a:rPr>
+                        <a:t>A controlled document: the CM Plan, a baseline, an ICD, a procedure.</a:t>
+                      </a:r>
+                      <a:endParaRPr lang="en-US" sz="1000" dirty="0">
+                        <a:latin typeface="Arial" charset="0"/>
+                        <a:ea typeface="Arial" charset="0"/>
+                        <a:cs typeface="Arial" charset="0"/>
+                      </a:endParaRPr>
+                    </a:p>
+                  </a:txBody>
+                  <a:tcPr marL="91440" marR="91440" marT="45720" marB="45720" anchor="ctr">
+                    <a:lnL w="9525" cap="flat" cmpd="sng" algn="ctr">
+                      <a:solidFill>
+                        <a:srgbClr val="D0D0D0"/>
+                      </a:solidFill>
+                      <a:prstDash val="solid"/>
+                      <a:round/>
+                      <a:headEnd type="none" w="med" len="med"/>
+                      <a:tailEnd type="none" w="med" len="med"/>
+                    </a:lnL>
+                    <a:lnR w="9525" cap="flat" cmpd="sng" algn="ctr">
+                      <a:solidFill>
+                        <a:srgbClr val="D0D0D0"/>
+                      </a:solidFill>
+                      <a:prstDash val="solid"/>
+                      <a:round/>
+                      <a:headEnd type="none" w="med" len="med"/>
+                      <a:tailEnd type="none" w="med" len="med"/>
+                    </a:lnR>
+                    <a:lnT w="9525" cap="flat" cmpd="sng" algn="ctr">
+                      <a:solidFill>
+                        <a:srgbClr val="D0D0D0"/>
+                      </a:solidFill>
+                      <a:prstDash val="solid"/>
+                      <a:round/>
+                      <a:headEnd type="none" w="med" len="med"/>
+                      <a:tailEnd type="none" w="med" len="med"/>
+                    </a:lnT>
+                    <a:lnB w="9525" cap="flat" cmpd="sng" algn="ctr">
+                      <a:solidFill>
+                        <a:srgbClr val="D0D0D0"/>
+                      </a:solidFill>
+                      <a:prstDash val="solid"/>
+                      <a:round/>
+                      <a:headEnd type="none" w="med" len="med"/>
+                      <a:tailEnd type="none" w="med" len="med"/>
+                    </a:lnB>
+                    <a:solidFill>
+                      <a:srgbClr val="FFFFFF"/>
+                    </a:solidFill>
+                  </a:tcPr>
+                </a:tc>
+                <a:tc>
+                  <a:txBody>
+                    <a:bodyPr/>
+                    <a:lstStyle/>
+                    <a:p>
+                      <a:pPr algn="l" indent="0" marL="0">
+                        <a:buNone/>
+                      </a:pPr>
+                      <a:r>
+                        <a:rPr lang="en-US" sz="1000" b="1" dirty="0">
+                          <a:solidFill>
+                            <a:srgbClr val="222222"/>
+                          </a:solidFill>
+                          <a:latin typeface="Arial" pitchFamily="34" charset="0"/>
+                          <a:ea typeface="Arial" pitchFamily="34" charset="-122"/>
+                          <a:cs typeface="Arial" pitchFamily="34" charset="-120"/>
+                        </a:rPr>
+                        <a:t>No record sample. Grade the document against every register row on the pull.</a:t>
+                      </a:r>
+                      <a:endParaRPr lang="en-US" sz="1000" dirty="0">
+                        <a:latin typeface="Arial" charset="0"/>
+                        <a:ea typeface="Arial" charset="0"/>
+                        <a:cs typeface="Arial" charset="0"/>
+                      </a:endParaRPr>
+                    </a:p>
+                  </a:txBody>
+                  <a:tcPr marL="91440" marR="91440" marT="45720" marB="45720" anchor="ctr">
+                    <a:lnL w="9525" cap="flat" cmpd="sng" algn="ctr">
+                      <a:solidFill>
+                        <a:srgbClr val="D0D0D0"/>
+                      </a:solidFill>
+                      <a:prstDash val="solid"/>
+                      <a:round/>
+                      <a:headEnd type="none" w="med" len="med"/>
+                      <a:tailEnd type="none" w="med" len="med"/>
+                    </a:lnL>
+                    <a:lnR w="9525" cap="flat" cmpd="sng" algn="ctr">
+                      <a:solidFill>
+                        <a:srgbClr val="D0D0D0"/>
+                      </a:solidFill>
+                      <a:prstDash val="solid"/>
+                      <a:round/>
+                      <a:headEnd type="none" w="med" len="med"/>
+                      <a:tailEnd type="none" w="med" len="med"/>
+                    </a:lnR>
+                    <a:lnT w="9525" cap="flat" cmpd="sng" algn="ctr">
+                      <a:solidFill>
+                        <a:srgbClr val="D0D0D0"/>
+                      </a:solidFill>
+                      <a:prstDash val="solid"/>
+                      <a:round/>
+                      <a:headEnd type="none" w="med" len="med"/>
+                      <a:tailEnd type="none" w="med" len="med"/>
+                    </a:lnT>
+                    <a:lnB w="9525" cap="flat" cmpd="sng" algn="ctr">
+                      <a:solidFill>
+                        <a:srgbClr val="D0D0D0"/>
+                      </a:solidFill>
+                      <a:prstDash val="solid"/>
+                      <a:round/>
+                      <a:headEnd type="none" w="med" len="med"/>
+                      <a:tailEnd type="none" w="med" len="med"/>
+                    </a:lnB>
+                    <a:solidFill>
+                      <a:srgbClr val="FFFFFF"/>
+                    </a:solidFill>
+                  </a:tcPr>
+                </a:tc>
+              </a:tr>
+            </a:tbl>
+          </a:graphicData>
+        </a:graphic>
+      </p:graphicFrame>
     </p:spTree>
   </p:cSld>
   <p:clrMapOvr>
@@ -3944,7 +4593,7 @@
                 <a:ea typeface="Arial" pitchFamily="34" charset="-122"/>
                 <a:cs typeface="Arial" pitchFamily="34" charset="-120"/>
               </a:rPr>
-              <a:t>Build the Evidence Pulls sheet first. The register rows fill in quickly once the pulls exist.</a:t>
+              <a:t>Build the Evidence Pulls sheet first. Fifty starter pulls are already seeded. The register rows fill in quickly once the pulls exist.</a:t>
             </a:r>
             <a:endParaRPr lang="en-US" sz="1200" dirty="0"/>
           </a:p>
@@ -3958,8 +4607,8 @@
         </p:nvSpPr>
         <p:spPr>
           <a:xfrm>
-            <a:off x="502920" y="1371600"/>
-            <a:ext cx="2743200" cy="4160520"/>
+            <a:off x="502920" y="1325880"/>
+            <a:ext cx="2743200" cy="4069080"/>
           </a:xfrm>
           <a:prstGeom prst="rect">
             <a:avLst/>
@@ -3990,7 +4639,7 @@
         </p:nvSpPr>
         <p:spPr>
           <a:xfrm>
-            <a:off x="667512" y="1554480"/>
+            <a:off x="667512" y="1508760"/>
             <a:ext cx="384048" cy="384048"/>
           </a:xfrm>
           <a:prstGeom prst="ellipse">
@@ -4015,7 +4664,7 @@
         </p:nvSpPr>
         <p:spPr>
           <a:xfrm>
-            <a:off x="667512" y="1591056"/>
+            <a:off x="667512" y="1545336"/>
             <a:ext cx="384048" cy="310896"/>
           </a:xfrm>
           <a:prstGeom prst="rect">
@@ -4054,7 +4703,7 @@
         </p:nvSpPr>
         <p:spPr>
           <a:xfrm>
-            <a:off x="1124712" y="1554480"/>
+            <a:off x="1124712" y="1508760"/>
             <a:ext cx="1956816" cy="420624"/>
           </a:xfrm>
           <a:prstGeom prst="rect">
@@ -4093,7 +4742,7 @@
         </p:nvSpPr>
         <p:spPr>
           <a:xfrm>
-            <a:off x="667512" y="2084832"/>
+            <a:off x="667512" y="2039112"/>
             <a:ext cx="2414016" cy="182880"/>
           </a:xfrm>
           <a:prstGeom prst="rect">
@@ -4132,7 +4781,7 @@
         </p:nvSpPr>
         <p:spPr>
           <a:xfrm>
-            <a:off x="667512" y="2286000"/>
+            <a:off x="667512" y="2240280"/>
             <a:ext cx="2414016" cy="1051560"/>
           </a:xfrm>
           <a:prstGeom prst="rect">
@@ -4171,8 +4820,8 @@
         </p:nvSpPr>
         <p:spPr>
           <a:xfrm>
-            <a:off x="612648" y="3383280"/>
-            <a:ext cx="2523744" cy="2011680"/>
+            <a:off x="612648" y="3300984"/>
+            <a:ext cx="2523744" cy="1947672"/>
           </a:xfrm>
           <a:prstGeom prst="rect">
             <a:avLst/>
@@ -4196,7 +4845,7 @@
         </p:nvSpPr>
         <p:spPr>
           <a:xfrm>
-            <a:off x="740664" y="3493008"/>
+            <a:off x="740664" y="3383280"/>
             <a:ext cx="2286000" cy="182880"/>
           </a:xfrm>
           <a:prstGeom prst="rect">
@@ -4235,8 +4884,8 @@
         </p:nvSpPr>
         <p:spPr>
           <a:xfrm>
-            <a:off x="740664" y="3694176"/>
-            <a:ext cx="2286000" cy="1627632"/>
+            <a:off x="740664" y="3584448"/>
+            <a:ext cx="2286000" cy="1609344"/>
           </a:xfrm>
           <a:prstGeom prst="rect">
             <a:avLst/>
@@ -4274,8 +4923,8 @@
         </p:nvSpPr>
         <p:spPr>
           <a:xfrm>
-            <a:off x="3456432" y="1371600"/>
-            <a:ext cx="2743200" cy="4160520"/>
+            <a:off x="3456432" y="1325880"/>
+            <a:ext cx="2743200" cy="4069080"/>
           </a:xfrm>
           <a:prstGeom prst="rect">
             <a:avLst/>
@@ -4306,7 +4955,7 @@
         </p:nvSpPr>
         <p:spPr>
           <a:xfrm>
-            <a:off x="3621024" y="1554480"/>
+            <a:off x="3621024" y="1508760"/>
             <a:ext cx="384048" cy="384048"/>
           </a:xfrm>
           <a:prstGeom prst="ellipse">
@@ -4331,7 +4980,7 @@
         </p:nvSpPr>
         <p:spPr>
           <a:xfrm>
-            <a:off x="3621024" y="1591056"/>
+            <a:off x="3621024" y="1545336"/>
             <a:ext cx="384048" cy="310896"/>
           </a:xfrm>
           <a:prstGeom prst="rect">
@@ -4370,7 +5019,7 @@
         </p:nvSpPr>
         <p:spPr>
           <a:xfrm>
-            <a:off x="4078224" y="1554480"/>
+            <a:off x="4078224" y="1508760"/>
             <a:ext cx="1956816" cy="420624"/>
           </a:xfrm>
           <a:prstGeom prst="rect">
@@ -4409,7 +5058,7 @@
         </p:nvSpPr>
         <p:spPr>
           <a:xfrm>
-            <a:off x="3621024" y="2084832"/>
+            <a:off x="3621024" y="2039112"/>
             <a:ext cx="2414016" cy="182880"/>
           </a:xfrm>
           <a:prstGeom prst="rect">
@@ -4448,7 +5097,7 @@
         </p:nvSpPr>
         <p:spPr>
           <a:xfrm>
-            <a:off x="3621024" y="2286000"/>
+            <a:off x="3621024" y="2240280"/>
             <a:ext cx="2414016" cy="1051560"/>
           </a:xfrm>
           <a:prstGeom prst="rect">
@@ -4487,8 +5136,8 @@
         </p:nvSpPr>
         <p:spPr>
           <a:xfrm>
-            <a:off x="3566160" y="3383280"/>
-            <a:ext cx="2523744" cy="2011680"/>
+            <a:off x="3566160" y="3300984"/>
+            <a:ext cx="2523744" cy="1947672"/>
           </a:xfrm>
           <a:prstGeom prst="rect">
             <a:avLst/>
@@ -4512,7 +5161,7 @@
         </p:nvSpPr>
         <p:spPr>
           <a:xfrm>
-            <a:off x="3694176" y="3493008"/>
+            <a:off x="3694176" y="3383280"/>
             <a:ext cx="2286000" cy="182880"/>
           </a:xfrm>
           <a:prstGeom prst="rect">
@@ -4551,8 +5200,8 @@
         </p:nvSpPr>
         <p:spPr>
           <a:xfrm>
-            <a:off x="3694176" y="3694176"/>
-            <a:ext cx="2286000" cy="1627632"/>
+            <a:off x="3694176" y="3584448"/>
+            <a:ext cx="2286000" cy="1609344"/>
           </a:xfrm>
           <a:prstGeom prst="rect">
             <a:avLst/>
@@ -4590,8 +5239,8 @@
         </p:nvSpPr>
         <p:spPr>
           <a:xfrm>
-            <a:off x="6409944" y="1371600"/>
-            <a:ext cx="2743200" cy="4160520"/>
+            <a:off x="6409944" y="1325880"/>
+            <a:ext cx="2743200" cy="4069080"/>
           </a:xfrm>
           <a:prstGeom prst="rect">
             <a:avLst/>
@@ -4622,7 +5271,7 @@
         </p:nvSpPr>
         <p:spPr>
           <a:xfrm>
-            <a:off x="6574536" y="1554480"/>
+            <a:off x="6574536" y="1508760"/>
             <a:ext cx="384048" cy="384048"/>
           </a:xfrm>
           <a:prstGeom prst="ellipse">
@@ -4647,7 +5296,7 @@
         </p:nvSpPr>
         <p:spPr>
           <a:xfrm>
-            <a:off x="6574536" y="1591056"/>
+            <a:off x="6574536" y="1545336"/>
             <a:ext cx="384048" cy="310896"/>
           </a:xfrm>
           <a:prstGeom prst="rect">
@@ -4686,7 +5335,7 @@
         </p:nvSpPr>
         <p:spPr>
           <a:xfrm>
-            <a:off x="7031736" y="1554480"/>
+            <a:off x="7031736" y="1508760"/>
             <a:ext cx="1956816" cy="420624"/>
           </a:xfrm>
           <a:prstGeom prst="rect">
@@ -4725,7 +5374,7 @@
         </p:nvSpPr>
         <p:spPr>
           <a:xfrm>
-            <a:off x="6574536" y="2084832"/>
+            <a:off x="6574536" y="2039112"/>
             <a:ext cx="2414016" cy="182880"/>
           </a:xfrm>
           <a:prstGeom prst="rect">
@@ -4764,7 +5413,7 @@
         </p:nvSpPr>
         <p:spPr>
           <a:xfrm>
-            <a:off x="6574536" y="2286000"/>
+            <a:off x="6574536" y="2240280"/>
             <a:ext cx="2414016" cy="1051560"/>
           </a:xfrm>
           <a:prstGeom prst="rect">
@@ -4803,8 +5452,8 @@
         </p:nvSpPr>
         <p:spPr>
           <a:xfrm>
-            <a:off x="6519672" y="3383280"/>
-            <a:ext cx="2523744" cy="2011680"/>
+            <a:off x="6519672" y="3300984"/>
+            <a:ext cx="2523744" cy="1947672"/>
           </a:xfrm>
           <a:prstGeom prst="rect">
             <a:avLst/>
@@ -4828,7 +5477,7 @@
         </p:nvSpPr>
         <p:spPr>
           <a:xfrm>
-            <a:off x="6647688" y="3493008"/>
+            <a:off x="6647688" y="3383280"/>
             <a:ext cx="2286000" cy="182880"/>
           </a:xfrm>
           <a:prstGeom prst="rect">
@@ -4867,8 +5516,8 @@
         </p:nvSpPr>
         <p:spPr>
           <a:xfrm>
-            <a:off x="6647688" y="3694176"/>
-            <a:ext cx="2286000" cy="1627632"/>
+            <a:off x="6647688" y="3584448"/>
+            <a:ext cx="2286000" cy="1609344"/>
           </a:xfrm>
           <a:prstGeom prst="rect">
             <a:avLst/>
@@ -4906,8 +5555,8 @@
         </p:nvSpPr>
         <p:spPr>
           <a:xfrm>
-            <a:off x="9363456" y="1371600"/>
-            <a:ext cx="2743200" cy="4160520"/>
+            <a:off x="9363456" y="1325880"/>
+            <a:ext cx="2743200" cy="4069080"/>
           </a:xfrm>
           <a:prstGeom prst="rect">
             <a:avLst/>
@@ -4938,7 +5587,7 @@
         </p:nvSpPr>
         <p:spPr>
           <a:xfrm>
-            <a:off x="9528048" y="1554480"/>
+            <a:off x="9528048" y="1508760"/>
             <a:ext cx="384048" cy="384048"/>
           </a:xfrm>
           <a:prstGeom prst="ellipse">
@@ -4963,7 +5612,7 @@
         </p:nvSpPr>
         <p:spPr>
           <a:xfrm>
-            <a:off x="9528048" y="1591056"/>
+            <a:off x="9528048" y="1545336"/>
             <a:ext cx="384048" cy="310896"/>
           </a:xfrm>
           <a:prstGeom prst="rect">
@@ -5002,7 +5651,7 @@
         </p:nvSpPr>
         <p:spPr>
           <a:xfrm>
-            <a:off x="9985248" y="1554480"/>
+            <a:off x="9985248" y="1508760"/>
             <a:ext cx="1956816" cy="420624"/>
           </a:xfrm>
           <a:prstGeom prst="rect">
@@ -5041,7 +5690,7 @@
         </p:nvSpPr>
         <p:spPr>
           <a:xfrm>
-            <a:off x="9528048" y="2084832"/>
+            <a:off x="9528048" y="2039112"/>
             <a:ext cx="2414016" cy="182880"/>
           </a:xfrm>
           <a:prstGeom prst="rect">
@@ -5080,7 +5729,7 @@
         </p:nvSpPr>
         <p:spPr>
           <a:xfrm>
-            <a:off x="9528048" y="2286000"/>
+            <a:off x="9528048" y="2240280"/>
             <a:ext cx="2414016" cy="1051560"/>
           </a:xfrm>
           <a:prstGeom prst="rect">
@@ -5119,8 +5768,8 @@
         </p:nvSpPr>
         <p:spPr>
           <a:xfrm>
-            <a:off x="9473184" y="3383280"/>
-            <a:ext cx="2523744" cy="2011680"/>
+            <a:off x="9473184" y="3300984"/>
+            <a:ext cx="2523744" cy="1947672"/>
           </a:xfrm>
           <a:prstGeom prst="rect">
             <a:avLst/>
@@ -5144,7 +5793,7 @@
         </p:nvSpPr>
         <p:spPr>
           <a:xfrm>
-            <a:off x="9601200" y="3493008"/>
+            <a:off x="9601200" y="3383280"/>
             <a:ext cx="2286000" cy="182880"/>
           </a:xfrm>
           <a:prstGeom prst="rect">
@@ -5183,8 +5832,8 @@
         </p:nvSpPr>
         <p:spPr>
           <a:xfrm>
-            <a:off x="9601200" y="3694176"/>
-            <a:ext cx="2286000" cy="1627632"/>
+            <a:off x="9601200" y="3584448"/>
+            <a:ext cx="2286000" cy="1609344"/>
           </a:xfrm>
           <a:prstGeom prst="rect">
             <a:avLst/>
@@ -5222,8 +5871,8 @@
         </p:nvSpPr>
         <p:spPr>
           <a:xfrm>
-            <a:off x="502920" y="5687568"/>
-            <a:ext cx="11155680" cy="658368"/>
+            <a:off x="502920" y="5614416"/>
+            <a:ext cx="5486400" cy="960120"/>
           </a:xfrm>
           <a:prstGeom prst="rect">
             <a:avLst/>
@@ -5247,8 +5896,8 @@
         </p:nvSpPr>
         <p:spPr>
           <a:xfrm>
-            <a:off x="713232" y="5797296"/>
-            <a:ext cx="10789920" cy="457200"/>
+            <a:off x="685800" y="5705856"/>
+            <a:ext cx="5120640" cy="219456"/>
           </a:xfrm>
           <a:prstGeom prst="rect">
             <a:avLst/>
@@ -5264,7 +5913,46 @@
               <a:buNone/>
             </a:pPr>
             <a:r>
-              <a:rPr lang="en-US" sz="1100" b="1" dirty="0">
+              <a:rPr lang="en-US" sz="1150" b="1" dirty="0">
+                <a:solidFill>
+                  <a:srgbClr val="C87A00"/>
+                </a:solidFill>
+                <a:latin typeface="Arial" pitchFamily="34" charset="0"/>
+                <a:ea typeface="Arial" pitchFamily="34" charset="-122"/>
+                <a:cs typeface="Arial" pitchFamily="34" charset="-120"/>
+              </a:rPr>
+              <a:t>A pull is where you looked, not what you found</a:t>
+            </a:r>
+            <a:endParaRPr lang="en-US" sz="1150" dirty="0"/>
+          </a:p>
+        </p:txBody>
+      </p:sp>
+      <p:sp>
+        <p:nvSpPr>
+          <p:cNvPr id="42" name="Text 40"/>
+          <p:cNvSpPr/>
+          <p:nvPr/>
+        </p:nvSpPr>
+        <p:spPr>
+          <a:xfrm>
+            <a:off x="685800" y="5943600"/>
+            <a:ext cx="5120640" cy="566928"/>
+          </a:xfrm>
+          <a:prstGeom prst="rect">
+            <a:avLst/>
+          </a:prstGeom>
+          <a:noFill/>
+          <a:ln/>
+        </p:spPr>
+        <p:txBody>
+          <a:bodyPr wrap="square" lIns="0" tIns="0" rIns="0" bIns="0" rtlCol="0" anchor="ctr"/>
+          <a:lstStyle/>
+          <a:p>
+            <a:pPr indent="0" marL="0">
+              <a:buNone/>
+            </a:pPr>
+            <a:r>
+              <a:rPr lang="en-US" sz="950" dirty="0">
                 <a:solidFill>
                   <a:srgbClr val="222222"/>
                 </a:solidFill>
@@ -5272,13 +5960,102 @@
                 <a:ea typeface="Arial" pitchFamily="34" charset="-122"/>
                 <a:cs typeface="Arial" pitchFamily="34" charset="-120"/>
               </a:rPr>
-              <a:t>Three rules settle most arguments:  </a:t>
+              <a:t>If the CM Plan must address something and does not, the pull is still the CM Plan. Record the Pull ID and grade the rung Not demonstrated. A blank Pull ID makes a real finding look like unfinished work.</a:t>
             </a:r>
+            <a:endParaRPr lang="en-US" sz="950" dirty="0"/>
+          </a:p>
+        </p:txBody>
+      </p:sp>
+      <p:sp>
+        <p:nvSpPr>
+          <p:cNvPr id="43" name="Shape 41"/>
+          <p:cNvSpPr/>
+          <p:nvPr/>
+        </p:nvSpPr>
+        <p:spPr>
+          <a:xfrm>
+            <a:off x="6172200" y="5614416"/>
+            <a:ext cx="5486400" cy="960120"/>
+          </a:xfrm>
+          <a:prstGeom prst="rect">
+            <a:avLst/>
+          </a:prstGeom>
+          <a:solidFill>
+            <a:srgbClr val="F4F5F7"/>
+          </a:solidFill>
+          <a:ln w="12700">
+            <a:solidFill>
+              <a:srgbClr val="D0D0D0"/>
+            </a:solidFill>
+            <a:prstDash val="solid"/>
+          </a:ln>
+        </p:spPr>
+      </p:sp>
+      <p:sp>
+        <p:nvSpPr>
+          <p:cNvPr id="44" name="Text 42"/>
+          <p:cNvSpPr/>
+          <p:nvPr/>
+        </p:nvSpPr>
+        <p:spPr>
+          <a:xfrm>
+            <a:off x="6355080" y="5705856"/>
+            <a:ext cx="5120640" cy="219456"/>
+          </a:xfrm>
+          <a:prstGeom prst="rect">
+            <a:avLst/>
+          </a:prstGeom>
+          <a:noFill/>
+          <a:ln/>
+        </p:spPr>
+        <p:txBody>
+          <a:bodyPr wrap="square" lIns="0" tIns="0" rIns="0" bIns="0" rtlCol="0" anchor="ctr"/>
+          <a:lstStyle/>
+          <a:p>
             <a:pPr indent="0" marL="0">
               <a:buNone/>
             </a:pPr>
             <a:r>
-              <a:rPr lang="en-US" sz="1100" dirty="0">
+              <a:rPr lang="en-US" sz="1150" b="1" dirty="0">
+                <a:solidFill>
+                  <a:srgbClr val="1F3864"/>
+                </a:solidFill>
+                <a:latin typeface="Arial" pitchFamily="34" charset="0"/>
+                <a:ea typeface="Arial" pitchFamily="34" charset="-122"/>
+                <a:cs typeface="Arial" pitchFamily="34" charset="-120"/>
+              </a:rPr>
+              <a:t>Two conformance numbers. The second is the honest one.</a:t>
+            </a:r>
+            <a:endParaRPr lang="en-US" sz="1150" dirty="0"/>
+          </a:p>
+        </p:txBody>
+      </p:sp>
+      <p:sp>
+        <p:nvSpPr>
+          <p:cNvPr id="45" name="Text 43"/>
+          <p:cNvSpPr/>
+          <p:nvPr/>
+        </p:nvSpPr>
+        <p:spPr>
+          <a:xfrm>
+            <a:off x="6355080" y="5943600"/>
+            <a:ext cx="5120640" cy="566928"/>
+          </a:xfrm>
+          <a:prstGeom prst="rect">
+            <a:avLst/>
+          </a:prstGeom>
+          <a:noFill/>
+          <a:ln/>
+        </p:spPr>
+        <p:txBody>
+          <a:bodyPr wrap="square" lIns="0" tIns="0" rIns="0" bIns="0" rtlCol="0" anchor="ctr"/>
+          <a:lstStyle/>
+          <a:p>
+            <a:pPr indent="0" marL="0">
+              <a:buNone/>
+            </a:pPr>
+            <a:r>
+              <a:rPr lang="en-US" sz="950" dirty="0">
                 <a:solidFill>
                   <a:srgbClr val="222222"/>
                 </a:solidFill>
@@ -5286,9 +6063,9 @@
                 <a:ea typeface="Arial" pitchFamily="34" charset="-122"/>
                 <a:cs typeface="Arial" pitchFamily="34" charset="-120"/>
               </a:rPr>
-              <a:t>a claim with no records is Not demonstrated, never Documented  •  a role with nobody in it is Unassigned, so "CM" and "the release team" both count as zero  •  when torn between two rungs, take the lower one.</a:t>
+              <a:t>Record conformance asks how many pulled records followed the process. Requirement coverage asks how many of the requirements on that pull reached Operating. A current, controlled CM Plan can cover 1 of 11: coverage reads 9 percent. It is computed from your rungs.</a:t>
             </a:r>
-            <a:endParaRPr lang="en-US" sz="1100" dirty="0"/>
+            <a:endParaRPr lang="en-US" sz="950" dirty="0"/>
           </a:p>
         </p:txBody>
       </p:sp>
